--- a/ufwl-timeline/UFWL_Gantt_EN_sample.pptx
+++ b/ufwl-timeline/UFWL_Gantt_EN_sample.pptx
@@ -9150,6 +9150,9 @@
           <a:lstStyle/>
           <a:p>
             <a:pPr algn="l" indent="0" marL="0">
+              <a:lnSpc>
+                <a:spcPct val="85000"/>
+              </a:lnSpc>
               <a:buNone/>
             </a:pPr>
             <a:r>
@@ -9162,6 +9165,26 @@
                 <a:cs typeface="Calibri" pitchFamily="34" charset="-120"/>
               </a:rPr>
               <a:t>Work Permit Requested</a:t>
+            </a:r>
+            <a:endParaRPr lang="en-US" sz="800" dirty="0"/>
+          </a:p>
+          <a:p>
+            <a:pPr algn="l" indent="0" marL="0">
+              <a:lnSpc>
+                <a:spcPct val="85000"/>
+              </a:lnSpc>
+              <a:buNone/>
+            </a:pPr>
+            <a:r>
+              <a:rPr lang="en-US" altLang="en-US" sz="550" dirty="0">
+                <a:solidFill>
+                  <a:srgbClr val="66707A"/>
+                </a:solidFill>
+                <a:latin typeface="Calibri" pitchFamily="34" charset="0"/>
+                <a:ea typeface="Calibri" pitchFamily="34" charset="-122"/>
+                <a:cs typeface="Calibri" pitchFamily="34" charset="-120"/>
+              </a:rPr>
+              <a:t>Permit requested to implement the foundation work that removes the soil-collapse risk.</a:t>
             </a:r>
             <a:endParaRPr lang="en-US" sz="800" dirty="0"/>
           </a:p>
@@ -9474,6 +9497,9 @@
           <a:lstStyle/>
           <a:p>
             <a:pPr algn="l" indent="0" marL="0">
+              <a:lnSpc>
+                <a:spcPct val="85000"/>
+              </a:lnSpc>
               <a:buNone/>
             </a:pPr>
             <a:r>
@@ -9486,6 +9512,26 @@
                 <a:cs typeface="Calibri" pitchFamily="34" charset="-120"/>
               </a:rPr>
               <a:t>Permit Request Rejected</a:t>
+            </a:r>
+            <a:endParaRPr lang="en-US" sz="800" dirty="0"/>
+          </a:p>
+          <a:p>
+            <a:pPr algn="l" indent="0" marL="0">
+              <a:lnSpc>
+                <a:spcPct val="85000"/>
+              </a:lnSpc>
+              <a:buNone/>
+            </a:pPr>
+            <a:r>
+              <a:rPr lang="en-US" altLang="en-US" sz="550" dirty="0">
+                <a:solidFill>
+                  <a:srgbClr val="66707A"/>
+                </a:solidFill>
+                <a:latin typeface="Calibri" pitchFamily="34" charset="0"/>
+                <a:ea typeface="Calibri" pitchFamily="34" charset="-122"/>
+                <a:cs typeface="Calibri" pitchFamily="34" charset="-120"/>
+              </a:rPr>
+              <a:t>The Permits Department rejected the work permit request.</a:t>
             </a:r>
             <a:endParaRPr lang="en-US" sz="800" dirty="0"/>
           </a:p>
@@ -9920,6 +9966,9 @@
           <a:lstStyle/>
           <a:p>
             <a:pPr algn="l" indent="0" marL="0">
+              <a:lnSpc>
+                <a:spcPct val="85000"/>
+              </a:lnSpc>
               <a:buNone/>
             </a:pPr>
             <a:r>
@@ -9932,6 +9981,26 @@
                 <a:cs typeface="Calibri" pitchFamily="34" charset="-120"/>
               </a:rPr>
               <a:t>Project Activities Suspended</a:t>
+            </a:r>
+            <a:endParaRPr lang="en-US" sz="800" dirty="0"/>
+          </a:p>
+          <a:p>
+            <a:pPr algn="l" indent="0" marL="0">
+              <a:lnSpc>
+                <a:spcPct val="85000"/>
+              </a:lnSpc>
+              <a:buNone/>
+            </a:pPr>
+            <a:r>
+              <a:rPr lang="en-US" altLang="en-US" sz="550" dirty="0">
+                <a:solidFill>
+                  <a:srgbClr val="66707A"/>
+                </a:solidFill>
+                <a:latin typeface="Calibri" pitchFamily="34" charset="0"/>
+                <a:ea typeface="Calibri" pitchFamily="34" charset="-122"/>
+                <a:cs typeface="Calibri" pitchFamily="34" charset="-120"/>
+              </a:rPr>
+              <a:t>The Permits and Safety Department suspended all project activities on site.</a:t>
             </a:r>
             <a:endParaRPr lang="en-US" sz="800" dirty="0"/>
           </a:p>
@@ -10244,6 +10313,9 @@
           <a:lstStyle/>
           <a:p>
             <a:pPr algn="l" indent="0" marL="0">
+              <a:lnSpc>
+                <a:spcPct val="85000"/>
+              </a:lnSpc>
               <a:buNone/>
             </a:pPr>
             <a:r>
@@ -10256,6 +10328,26 @@
                 <a:cs typeface="Calibri" pitchFamily="34" charset="-120"/>
               </a:rPr>
               <a:t>Joint Site Visit</a:t>
+            </a:r>
+            <a:endParaRPr lang="en-US" sz="800" dirty="0"/>
+          </a:p>
+          <a:p>
+            <a:pPr algn="l" indent="0" marL="0">
+              <a:lnSpc>
+                <a:spcPct val="85000"/>
+              </a:lnSpc>
+              <a:buNone/>
+            </a:pPr>
+            <a:r>
+              <a:rPr lang="en-US" altLang="en-US" sz="550" dirty="0">
+                <a:solidFill>
+                  <a:srgbClr val="66707A"/>
+                </a:solidFill>
+                <a:latin typeface="Calibri" pitchFamily="34" charset="0"/>
+                <a:ea typeface="Calibri" pitchFamily="34" charset="-122"/>
+                <a:cs typeface="Calibri" pitchFamily="34" charset="-120"/>
+              </a:rPr>
+              <a:t>Joint visit with all concerned departments (Permits, …) to assess site conditions.</a:t>
             </a:r>
             <a:endParaRPr lang="en-US" sz="800" dirty="0"/>
           </a:p>
@@ -10568,6 +10660,9 @@
           <a:lstStyle/>
           <a:p>
             <a:pPr algn="l" indent="0" marL="0">
+              <a:lnSpc>
+                <a:spcPct val="85000"/>
+              </a:lnSpc>
               <a:buNone/>
             </a:pPr>
             <a:r>
@@ -10580,6 +10675,26 @@
                 <a:cs typeface="Calibri" pitchFamily="34" charset="-120"/>
               </a:rPr>
               <a:t>Risk Assessment &amp; Mitigation Plan Submitted</a:t>
+            </a:r>
+            <a:endParaRPr lang="en-US" sz="800" dirty="0"/>
+          </a:p>
+          <a:p>
+            <a:pPr algn="l" indent="0" marL="0">
+              <a:lnSpc>
+                <a:spcPct val="85000"/>
+              </a:lnSpc>
+              <a:buNone/>
+            </a:pPr>
+            <a:r>
+              <a:rPr lang="en-US" altLang="en-US" sz="550" dirty="0">
+                <a:solidFill>
+                  <a:srgbClr val="66707A"/>
+                </a:solidFill>
+                <a:latin typeface="Calibri" pitchFamily="34" charset="0"/>
+                <a:ea typeface="Calibri" pitchFamily="34" charset="-122"/>
+                <a:cs typeface="Calibri" pitchFamily="34" charset="-120"/>
+              </a:rPr>
+              <a:t>Sent to the Permits Department in order to resume the work.</a:t>
             </a:r>
             <a:endParaRPr lang="en-US" sz="800" dirty="0"/>
           </a:p>
@@ -10892,6 +11007,9 @@
           <a:lstStyle/>
           <a:p>
             <a:pPr algn="l" indent="0" marL="0">
+              <a:lnSpc>
+                <a:spcPct val="85000"/>
+              </a:lnSpc>
               <a:buNone/>
             </a:pPr>
             <a:r>
@@ -10904,6 +11022,26 @@
                 <a:cs typeface="Calibri" pitchFamily="34" charset="-120"/>
               </a:rPr>
               <a:t>Detailed Action Plan Requested</a:t>
+            </a:r>
+            <a:endParaRPr lang="en-US" sz="800" dirty="0"/>
+          </a:p>
+          <a:p>
+            <a:pPr algn="l" indent="0" marL="0">
+              <a:lnSpc>
+                <a:spcPct val="85000"/>
+              </a:lnSpc>
+              <a:buNone/>
+            </a:pPr>
+            <a:r>
+              <a:rPr lang="en-US" altLang="en-US" sz="550" dirty="0">
+                <a:solidFill>
+                  <a:srgbClr val="66707A"/>
+                </a:solidFill>
+                <a:latin typeface="Calibri" pitchFamily="34" charset="0"/>
+                <a:ea typeface="Calibri" pitchFamily="34" charset="-122"/>
+                <a:cs typeface="Calibri" pitchFamily="34" charset="-120"/>
+              </a:rPr>
+              <a:t>The Permits Department asked for a more detailed action plan.</a:t>
             </a:r>
             <a:endParaRPr lang="en-US" sz="800" dirty="0"/>
           </a:p>
@@ -11338,6 +11476,9 @@
           <a:lstStyle/>
           <a:p>
             <a:pPr algn="l" indent="0" marL="0">
+              <a:lnSpc>
+                <a:spcPct val="85000"/>
+              </a:lnSpc>
               <a:buNone/>
             </a:pPr>
             <a:r>
@@ -11350,6 +11491,26 @@
                 <a:cs typeface="Calibri" pitchFamily="34" charset="-120"/>
               </a:rPr>
               <a:t>Method Statement (MoS) Submitted</a:t>
+            </a:r>
+            <a:endParaRPr lang="en-US" sz="800" dirty="0"/>
+          </a:p>
+          <a:p>
+            <a:pPr algn="l" indent="0" marL="0">
+              <a:lnSpc>
+                <a:spcPct val="85000"/>
+              </a:lnSpc>
+              <a:buNone/>
+            </a:pPr>
+            <a:r>
+              <a:rPr lang="en-US" altLang="en-US" sz="550" dirty="0">
+                <a:solidFill>
+                  <a:srgbClr val="66707A"/>
+                </a:solidFill>
+                <a:latin typeface="Calibri" pitchFamily="34" charset="0"/>
+                <a:ea typeface="Calibri" pitchFamily="34" charset="-122"/>
+                <a:cs typeface="Calibri" pitchFamily="34" charset="-120"/>
+              </a:rPr>
+              <a:t>Detailed MoS and action plan sent to all departments for review and approval.</a:t>
             </a:r>
             <a:endParaRPr lang="en-US" sz="800" dirty="0"/>
           </a:p>
@@ -11590,6 +11751,9 @@
           <a:lstStyle/>
           <a:p>
             <a:pPr algn="l" indent="0" marL="0">
+              <a:lnSpc>
+                <a:spcPct val="85000"/>
+              </a:lnSpc>
               <a:buNone/>
             </a:pPr>
             <a:r>
@@ -11602,6 +11766,26 @@
                 <a:cs typeface="Calibri" pitchFamily="34" charset="-120"/>
               </a:rPr>
               <a:t>Stakeholders Meeting</a:t>
+            </a:r>
+            <a:endParaRPr lang="en-US" sz="800" dirty="0"/>
+          </a:p>
+          <a:p>
+            <a:pPr algn="l" indent="0" marL="0">
+              <a:lnSpc>
+                <a:spcPct val="85000"/>
+              </a:lnSpc>
+              <a:buNone/>
+            </a:pPr>
+            <a:r>
+              <a:rPr lang="en-US" altLang="en-US" sz="550" dirty="0">
+                <a:solidFill>
+                  <a:srgbClr val="66707A"/>
+                </a:solidFill>
+                <a:latin typeface="Calibri" pitchFamily="34" charset="0"/>
+                <a:ea typeface="Calibri" pitchFamily="34" charset="-122"/>
+                <a:cs typeface="Calibri" pitchFamily="34" charset="-120"/>
+              </a:rPr>
+              <a:t>Agreed the way forward; departments asked to review and approve the measures.</a:t>
             </a:r>
             <a:endParaRPr lang="en-US" sz="800" dirty="0"/>
           </a:p>
@@ -11914,6 +12098,9 @@
           <a:lstStyle/>
           <a:p>
             <a:pPr algn="l" indent="0" marL="0">
+              <a:lnSpc>
+                <a:spcPct val="85000"/>
+              </a:lnSpc>
               <a:buNone/>
             </a:pPr>
             <a:r>
@@ -11926,6 +12113,26 @@
                 <a:cs typeface="Calibri" pitchFamily="34" charset="-120"/>
               </a:rPr>
               <a:t>Stakeholders’ Clarifications Answered</a:t>
+            </a:r>
+            <a:endParaRPr lang="en-US" sz="800" dirty="0"/>
+          </a:p>
+          <a:p>
+            <a:pPr algn="l" indent="0" marL="0">
+              <a:lnSpc>
+                <a:spcPct val="85000"/>
+              </a:lnSpc>
+              <a:buNone/>
+            </a:pPr>
+            <a:r>
+              <a:rPr lang="en-US" altLang="en-US" sz="550" dirty="0">
+                <a:solidFill>
+                  <a:srgbClr val="66707A"/>
+                </a:solidFill>
+                <a:latin typeface="Calibri" pitchFamily="34" charset="0"/>
+                <a:ea typeface="Calibri" pitchFamily="34" charset="-122"/>
+                <a:cs typeface="Calibri" pitchFamily="34" charset="-120"/>
+              </a:rPr>
+              <a:t>Replies given on all clarifications about the proposed work and safety measures.</a:t>
             </a:r>
             <a:endParaRPr lang="en-US" sz="800" dirty="0"/>
           </a:p>
@@ -12238,6 +12445,9 @@
           <a:lstStyle/>
           <a:p>
             <a:pPr algn="l" indent="0" marL="0">
+              <a:lnSpc>
+                <a:spcPct val="85000"/>
+              </a:lnSpc>
               <a:buNone/>
             </a:pPr>
             <a:r>
@@ -12250,6 +12460,26 @@
                 <a:cs typeface="Calibri" pitchFamily="34" charset="-120"/>
               </a:rPr>
               <a:t>Engineering Clarification Received</a:t>
+            </a:r>
+            <a:endParaRPr lang="en-US" sz="800" dirty="0"/>
+          </a:p>
+          <a:p>
+            <a:pPr algn="l" indent="0" marL="0">
+              <a:lnSpc>
+                <a:spcPct val="85000"/>
+              </a:lnSpc>
+              <a:buNone/>
+            </a:pPr>
+            <a:r>
+              <a:rPr lang="en-US" altLang="en-US" sz="550" dirty="0">
+                <a:solidFill>
+                  <a:srgbClr val="66707A"/>
+                </a:solidFill>
+                <a:latin typeface="Calibri" pitchFamily="34" charset="0"/>
+                <a:ea typeface="Calibri" pitchFamily="34" charset="-122"/>
+                <a:cs typeface="Calibri" pitchFamily="34" charset="-120"/>
+              </a:rPr>
+              <a:t>Engineering Department raised a clarification on the Method Statement.</a:t>
             </a:r>
             <a:endParaRPr lang="en-US" sz="800" dirty="0"/>
           </a:p>
@@ -12562,6 +12792,9 @@
           <a:lstStyle/>
           <a:p>
             <a:pPr algn="l" indent="0" marL="0">
+              <a:lnSpc>
+                <a:spcPct val="85000"/>
+              </a:lnSpc>
               <a:buNone/>
             </a:pPr>
             <a:r>
@@ -12574,6 +12807,26 @@
                 <a:cs typeface="Calibri" pitchFamily="34" charset="-120"/>
               </a:rPr>
               <a:t>MoS Revision 2 Submitted</a:t>
+            </a:r>
+            <a:endParaRPr lang="en-US" sz="800" dirty="0"/>
+          </a:p>
+          <a:p>
+            <a:pPr algn="l" indent="0" marL="0">
+              <a:lnSpc>
+                <a:spcPct val="85000"/>
+              </a:lnSpc>
+              <a:buNone/>
+            </a:pPr>
+            <a:r>
+              <a:rPr lang="en-US" altLang="en-US" sz="550" dirty="0">
+                <a:solidFill>
+                  <a:srgbClr val="66707A"/>
+                </a:solidFill>
+                <a:latin typeface="Calibri" pitchFamily="34" charset="0"/>
+                <a:ea typeface="Calibri" pitchFamily="34" charset="-122"/>
+                <a:cs typeface="Calibri" pitchFamily="34" charset="-120"/>
+              </a:rPr>
+              <a:t>2nd revision of the MoS submitted to all concerned departments.</a:t>
             </a:r>
             <a:endParaRPr lang="en-US" sz="800" dirty="0"/>
           </a:p>
@@ -13008,6 +13261,9 @@
           <a:lstStyle/>
           <a:p>
             <a:pPr algn="l" indent="0" marL="0">
+              <a:lnSpc>
+                <a:spcPct val="85000"/>
+              </a:lnSpc>
               <a:buNone/>
             </a:pPr>
             <a:r>
@@ -13020,6 +13276,26 @@
                 <a:cs typeface="Calibri" pitchFamily="34" charset="-120"/>
               </a:rPr>
               <a:t>Safety Department Contacted</a:t>
+            </a:r>
+            <a:endParaRPr lang="en-US" sz="800" dirty="0"/>
+          </a:p>
+          <a:p>
+            <a:pPr algn="l" indent="0" marL="0">
+              <a:lnSpc>
+                <a:spcPct val="85000"/>
+              </a:lnSpc>
+              <a:buNone/>
+            </a:pPr>
+            <a:r>
+              <a:rPr lang="en-US" altLang="en-US" sz="550" dirty="0">
+                <a:solidFill>
+                  <a:srgbClr val="66707A"/>
+                </a:solidFill>
+                <a:latin typeface="Calibri" pitchFamily="34" charset="0"/>
+                <a:ea typeface="Calibri" pitchFamily="34" charset="-122"/>
+                <a:cs typeface="Calibri" pitchFamily="34" charset="-120"/>
+              </a:rPr>
+              <a:t>All documents shared; Safety contacted to facilitate the permit issuance.</a:t>
             </a:r>
             <a:endParaRPr lang="en-US" sz="800" dirty="0"/>
           </a:p>
@@ -13332,6 +13608,9 @@
           <a:lstStyle/>
           <a:p>
             <a:pPr algn="l" indent="0" marL="0">
+              <a:lnSpc>
+                <a:spcPct val="85000"/>
+              </a:lnSpc>
               <a:buNone/>
             </a:pPr>
             <a:r>
@@ -13344,6 +13623,26 @@
                 <a:cs typeface="Calibri" pitchFamily="34" charset="-120"/>
               </a:rPr>
               <a:t>Permit Circulated for Approvals</a:t>
+            </a:r>
+            <a:endParaRPr lang="en-US" sz="800" dirty="0"/>
+          </a:p>
+          <a:p>
+            <a:pPr algn="l" indent="0" marL="0">
+              <a:lnSpc>
+                <a:spcPct val="85000"/>
+              </a:lnSpc>
+              <a:buNone/>
+            </a:pPr>
+            <a:r>
+              <a:rPr lang="en-US" altLang="en-US" sz="550" dirty="0">
+                <a:solidFill>
+                  <a:srgbClr val="66707A"/>
+                </a:solidFill>
+                <a:latin typeface="Calibri" pitchFamily="34" charset="0"/>
+                <a:ea typeface="Calibri" pitchFamily="34" charset="-122"/>
+                <a:cs typeface="Calibri" pitchFamily="34" charset="-120"/>
+              </a:rPr>
+              <a:t>Permit-to-work sent to the concerned departments for their approval.</a:t>
             </a:r>
             <a:endParaRPr lang="en-US" sz="800" dirty="0"/>
           </a:p>
@@ -13656,6 +13955,9 @@
           <a:lstStyle/>
           <a:p>
             <a:pPr algn="l" indent="0" marL="0">
+              <a:lnSpc>
+                <a:spcPct val="85000"/>
+              </a:lnSpc>
               <a:buNone/>
             </a:pPr>
             <a:r>
@@ -13668,6 +13970,26 @@
                 <a:cs typeface="Calibri" pitchFamily="34" charset="-120"/>
               </a:rPr>
               <a:t>Further Department Comments</a:t>
+            </a:r>
+            <a:endParaRPr lang="en-US" sz="800" dirty="0"/>
+          </a:p>
+          <a:p>
+            <a:pPr algn="l" indent="0" marL="0">
+              <a:lnSpc>
+                <a:spcPct val="85000"/>
+              </a:lnSpc>
+              <a:buNone/>
+            </a:pPr>
+            <a:r>
+              <a:rPr lang="en-US" altLang="en-US" sz="550" dirty="0">
+                <a:solidFill>
+                  <a:srgbClr val="66707A"/>
+                </a:solidFill>
+                <a:latin typeface="Calibri" pitchFamily="34" charset="0"/>
+                <a:ea typeface="Calibri" pitchFamily="34" charset="-122"/>
+                <a:cs typeface="Calibri" pitchFamily="34" charset="-120"/>
+              </a:rPr>
+              <a:t>Further comments received from other departments.</a:t>
             </a:r>
             <a:endParaRPr lang="en-US" sz="800" dirty="0"/>
           </a:p>
@@ -13980,6 +14302,9 @@
           <a:lstStyle/>
           <a:p>
             <a:pPr algn="l" indent="0" marL="0">
+              <a:lnSpc>
+                <a:spcPct val="85000"/>
+              </a:lnSpc>
               <a:buNone/>
             </a:pPr>
             <a:r>
@@ -13992,6 +14317,26 @@
                 <a:cs typeface="Calibri" pitchFamily="34" charset="-120"/>
               </a:rPr>
               <a:t>MoS Revision 3 Submitted</a:t>
+            </a:r>
+            <a:endParaRPr lang="en-US" sz="800" dirty="0"/>
+          </a:p>
+          <a:p>
+            <a:pPr algn="l" indent="0" marL="0">
+              <a:lnSpc>
+                <a:spcPct val="85000"/>
+              </a:lnSpc>
+              <a:buNone/>
+            </a:pPr>
+            <a:r>
+              <a:rPr lang="en-US" altLang="en-US" sz="550" dirty="0">
+                <a:solidFill>
+                  <a:srgbClr val="66707A"/>
+                </a:solidFill>
+                <a:latin typeface="Calibri" pitchFamily="34" charset="0"/>
+                <a:ea typeface="Calibri" pitchFamily="34" charset="-122"/>
+                <a:cs typeface="Calibri" pitchFamily="34" charset="-120"/>
+              </a:rPr>
+              <a:t>3rd revision of the MoS submitted to all for approval.</a:t>
             </a:r>
             <a:endParaRPr lang="en-US" sz="800" dirty="0"/>
           </a:p>
@@ -14304,6 +14649,9 @@
           <a:lstStyle/>
           <a:p>
             <a:pPr algn="l" indent="0" marL="0">
+              <a:lnSpc>
+                <a:spcPct val="85000"/>
+              </a:lnSpc>
               <a:buNone/>
             </a:pPr>
             <a:r>
@@ -14316,6 +14664,26 @@
                 <a:cs typeface="Calibri" pitchFamily="34" charset="-120"/>
               </a:rPr>
               <a:t>Last Clarification Cleared</a:t>
+            </a:r>
+            <a:endParaRPr lang="en-US" sz="800" dirty="0"/>
+          </a:p>
+          <a:p>
+            <a:pPr algn="l" indent="0" marL="0">
+              <a:lnSpc>
+                <a:spcPct val="85000"/>
+              </a:lnSpc>
+              <a:buNone/>
+            </a:pPr>
+            <a:r>
+              <a:rPr lang="en-US" altLang="en-US" sz="550" dirty="0">
+                <a:solidFill>
+                  <a:srgbClr val="66707A"/>
+                </a:solidFill>
+                <a:latin typeface="Calibri" pitchFamily="34" charset="0"/>
+                <a:ea typeface="Calibri" pitchFamily="34" charset="-122"/>
+                <a:cs typeface="Calibri" pitchFamily="34" charset="-120"/>
+              </a:rPr>
+              <a:t>The remaining clarification on the Method Statement was cleared.</a:t>
             </a:r>
             <a:endParaRPr lang="en-US" sz="800" dirty="0"/>
           </a:p>
@@ -14628,6 +14996,9 @@
           <a:lstStyle/>
           <a:p>
             <a:pPr algn="l" indent="0" marL="0">
+              <a:lnSpc>
+                <a:spcPct val="85000"/>
+              </a:lnSpc>
               <a:buNone/>
             </a:pPr>
             <a:r>
@@ -14640,6 +15011,26 @@
                 <a:cs typeface="Calibri" pitchFamily="34" charset="-120"/>
               </a:rPr>
               <a:t>Work Permit Ready for Signature</a:t>
+            </a:r>
+            <a:endParaRPr lang="en-US" sz="800" dirty="0"/>
+          </a:p>
+          <a:p>
+            <a:pPr algn="l" indent="0" marL="0">
+              <a:lnSpc>
+                <a:spcPct val="85000"/>
+              </a:lnSpc>
+              <a:buNone/>
+            </a:pPr>
+            <a:r>
+              <a:rPr lang="en-US" altLang="en-US" sz="550" dirty="0">
+                <a:solidFill>
+                  <a:srgbClr val="66707A"/>
+                </a:solidFill>
+                <a:latin typeface="Calibri" pitchFamily="34" charset="0"/>
+                <a:ea typeface="Calibri" pitchFamily="34" charset="-122"/>
+                <a:cs typeface="Calibri" pitchFamily="34" charset="-120"/>
+              </a:rPr>
+              <a:t>The Work Permit is ready to be signed and issued.</a:t>
             </a:r>
             <a:endParaRPr lang="en-US" sz="800" dirty="0"/>
           </a:p>
